--- a/Website/static/downloads/showcase/powerpoint/design-brief-recommendations.pptx
+++ b/Website/static/downloads/showcase/powerpoint/design-brief-recommendations.pptx
@@ -5,7 +5,7 @@
     <p:sldMasterId xmlns:r="http://schemas.openxmlformats.org/officeDocument/2006/relationships" id="2147483648" r:id="rId1"/>
   </p:sldMasterIdLst>
   <p:notesMasterIdLst>
-    <p:notesMasterId xmlns:r="http://schemas.openxmlformats.org/officeDocument/2006/relationships" r:id="R625243a4477f4b32"/>
+    <p:notesMasterId xmlns:r="http://schemas.openxmlformats.org/officeDocument/2006/relationships" r:id="R77eff97fb1664300"/>
   </p:notesMasterIdLst>
   <p:sldIdLst>
     <p:sldId xmlns:r="http://schemas.openxmlformats.org/officeDocument/2006/relationships" id="256" r:id="rId2"/>
